--- a/docs/Ishtirak_Presentation.pptx
+++ b/docs/Ishtirak_Presentation.pptx
@@ -175,13 +175,13 @@
                 <c:formatCode>General</c:formatCode>
                 <c:ptCount val="3"/>
                 <c:pt idx="0">
-                  <c:v>79.5</c:v>
+                  <c:v>86.6</c:v>
                 </c:pt>
                 <c:pt idx="1">
-                  <c:v>78.3</c:v>
+                  <c:v>99.8</c:v>
                 </c:pt>
                 <c:pt idx="2">
-                  <c:v>79.4</c:v>
+                  <c:v>107.5</c:v>
                 </c:pt>
               </c:numCache>
             </c:numRef>
@@ -231,13 +231,13 @@
                 <c:formatCode>General</c:formatCode>
                 <c:ptCount val="3"/>
                 <c:pt idx="0">
-                  <c:v>113.3</c:v>
+                  <c:v>133.1</c:v>
                 </c:pt>
                 <c:pt idx="1">
-                  <c:v>112.9</c:v>
+                  <c:v>167.0</c:v>
                 </c:pt>
                 <c:pt idx="2">
-                  <c:v>114.1</c:v>
+                  <c:v>156.7</c:v>
                 </c:pt>
               </c:numCache>
             </c:numRef>
@@ -314,7 +314,7 @@
       <c:valAx>
         <c:axId val="-2113994440"/>
         <c:scaling>
-          <c:max val="140.0"/>
+          <c:max val="200.0"/>
           <c:min val="0.0"/>
         </c:scaling>
         <c:delete val="0"/>
@@ -353,7 +353,7 @@
         </c:txPr>
         <c:crossAx val="-2068027336"/>
         <c:crosses val="autoZero"/>
-        <c:majorUnit val="20.0"/>
+        <c:majorUnit val="50.0"/>
       </c:valAx>
     </c:plotArea>
     <c:legend>
@@ -462,16 +462,16 @@
                 <c:formatCode>General</c:formatCode>
                 <c:ptCount val="4"/>
                 <c:pt idx="0">
-                  <c:v>25.9</c:v>
+                  <c:v>26.0</c:v>
                 </c:pt>
                 <c:pt idx="1">
-                  <c:v>46.8</c:v>
+                  <c:v>42.7</c:v>
                 </c:pt>
                 <c:pt idx="2">
-                  <c:v>52.7</c:v>
+                  <c:v>47.5</c:v>
                 </c:pt>
                 <c:pt idx="3">
-                  <c:v>51.6</c:v>
+                  <c:v>47.3</c:v>
                 </c:pt>
               </c:numCache>
             </c:numRef>
@@ -705,16 +705,16 @@
                 <c:formatCode>General</c:formatCode>
                 <c:ptCount val="4"/>
                 <c:pt idx="0">
-                  <c:v>38.8</c:v>
+                  <c:v>35.9</c:v>
                 </c:pt>
                 <c:pt idx="1">
-                  <c:v>82.1</c:v>
+                  <c:v>86.9</c:v>
                 </c:pt>
                 <c:pt idx="2">
-                  <c:v>275.6</c:v>
+                  <c:v>308.1</c:v>
                 </c:pt>
                 <c:pt idx="3">
-                  <c:v>300.6</c:v>
+                  <c:v>336.3</c:v>
                 </c:pt>
               </c:numCache>
             </c:numRef>
@@ -1412,7 +1412,7 @@
           <a:lstStyle/>
           <a:p>
             <a:r>
-              <a:t>To go beyond hand-picked tests, we wrote a small randomized fault checker, in the spirit of Jepsen. With a fixed seed it sends over fifteen hundred requests while services are stopped and restarted, including a window when two coordinators are down together. Result: 284 accepted, 1,183 rejected, and 62 unknown outcomes. Unknown does not mean rejected: the request may have committed, so we retry with the same ID. Max granted 120, never above, zero violations, and all coordinators ended at the same log position. This is evidence from one seed, not a proof.</a:t>
+              <a:t>To go beyond hand-picked tests, we wrote a small randomized fault checker, in the spirit of Jepsen. With a fixed seed it sends over fifteen hundred requests while services are stopped and restarted, including a window when two coordinators are down together. Result: 427 accepted, 1,055 rejected, and 77 unknown outcomes. Unknown does not mean rejected: the request may have committed, so we retry with the same ID. Max granted 120, never above, zero violations, and all coordinators ended at the same log position. This is evidence from one seed, not a proof.</a:t>
             </a:r>
           </a:p>
         </p:txBody>
@@ -1482,7 +1482,7 @@
           <a:lstStyle/>
           <a:p>
             <a:r>
-              <a:t>For performance, we measured how long one allocation decision takes with ten, fifty and two hundred simulated meters. Median latency, called p50, is about 78 to 80 milliseconds every time, and p95, the time within which 95 percent of requests finish, is about 113 milliseconds. Each number is the mean of five trials. Meanwhile the readings flowing through the gateways grew from about ten to about one hundred ninety-four per second. To be careful: the decision test does not itself generate meter load, so the readings column is what shows the volume.</a:t>
+              <a:t>For performance, we measured how long one allocation decision takes with ten, fifty and two hundred simulated meters. Median latency, called p50, is roughly 90 to 110 milliseconds, and p95, the time within which 95 percent of requests finish, is about 130 to 170 milliseconds. Each number is the mean of five trials. Meanwhile the readings flowing through the gateways grew from about ten to about one hundred ninety per second. The earlier run, before our last change, measured about 79 milliseconds, but the laptop was busier this time, so we do not claim a difference. To be careful: the decision test does not itself generate meter load, so the readings column is what shows the volume.</a:t>
             </a:r>
           </a:p>
         </p:txBody>
@@ -1552,7 +1552,7 @@
           <a:lstStyle/>
           <a:p>
             <a:r>
-              <a:t>We also pushed the system harder by adding more concurrent clients: one, four, sixteen and sixty-four. Throughput climbs and then flattens at about fifty decisions per second, while latency keeps growing. That is what you expect when requests queue behind one serialized step, and every grant does go through one Raft leader. But I want to be honest: we did not profile it, so we cannot say the leader is the bottleneck. Separately, a change in demand showed up on the dashboard in about two thirds of a second on average.</a:t>
+              <a:t>We also pushed the system harder by adding more concurrent clients: one, four, sixteen and sixty-four. Throughput climbs and then flattens at about forty-seven decisions per second, while latency keeps growing. That is what you expect when requests queue behind one serialized step, and every grant does go through one Raft leader. But I want to be honest: we did not profile it, so we cannot say the leader is the bottleneck. Separately, a change in demand showed up on the dashboard in about two thirds of a second on average.</a:t>
             </a:r>
           </a:p>
         </p:txBody>
@@ -1622,7 +1622,7 @@
           <a:lstStyle/>
           <a:p>
             <a:r>
-              <a:t>Here are the hard problems and what each fix costs. When a request times out we cannot know whether it committed, so we retry with the same ID. Duplicates are handled by idempotency. A stale leader cannot erase a newer lease because expiry is tied to the lease version and term. For clocks we only rely on durations. If no majority exists we refuse grants: that is safety over availability. The biggest weakness: renewals never shrink, so after our 200-meter test one building kept a big reservation and starved the others. Capacity stayed safe, fairness did not. A safe shrink rule is future work.</a:t>
+              <a:t>Here are the hard problems and what each fix costs. When a request times out we cannot know whether it committed, so we retry with the same ID. Duplicates are handled by idempotency. A stale leader cannot erase a newer lease because expiry is tied to the lease version and term. For clocks we only rely on durations. If no majority exists we refuse grants: that is safety over availability. The most interesting one: originally a renewal never shrank a reservation, so after a demand spike one building kept about a hundred amps and starved the others. Capacity stayed safe, fairness did not. We fixed it with tiers: each older, larger grant expires on its own twelve second hold, so the reservation steps down by itself. In the test, every building was back within budget about seventeen seconds after the spike. It is still first-come, with no preemption.</a:t>
             </a:r>
           </a:p>
         </p:txBody>
@@ -1692,7 +1692,7 @@
           <a:lstStyle/>
           <a:p>
             <a:r>
-              <a:t>I want to be clear about what we have not shown. All tests ran on one machine, with repeats on one stack, so they are not independent samples, and we did not inject network delay or packet loss. The project also has stated limits: gateways are not replicated, there is a single PostgreSQL database, and readings can be lost while a gateway is down. There is no fairness guarantee either. Next steps would be testing on several machines, profiling the commit path, a safe way to shrink reservations, and a properly secured deployment.</a:t>
+              <a:t>I want to be clear about what we have not shown. All tests ran on one machine, with repeats on one stack, so they are not independent samples, and we did not inject network delay or packet loss. The project also has stated limits: gateways are not replicated, there is a single PostgreSQL database, and readings can be lost while a gateway is down. Allocation is still first-come, with no fair-share policy. Next steps would be testing on several machines, profiling the commit path, fair-share admission, and a properly secured deployment.</a:t>
             </a:r>
           </a:p>
         </p:txBody>
@@ -6381,7 +6381,7 @@
                           </a:solidFill>
                           <a:latin typeface="Segoe UI"/>
                         </a:rPr>
-                        <a:t>Lease reclaimed in 12.34 s on average (range 10.80–14.25 s); each restart got a fresh session</a:t>
+                        <a:t>Lease reclaimed in 13.62 s on average (range 12.89–14.38 s); each restart got a fresh session</a:t>
                       </a:r>
                     </a:p>
                   </a:txBody>
@@ -6471,7 +6471,7 @@
                           </a:solidFill>
                           <a:latin typeface="Segoe UI"/>
                         </a:rPr>
-                        <a:t>A replacement accepted a grant after 4.82 s on average (range 4.05–6.34 s)</a:t>
+                        <a:t>A replacement accepted a grant after 4.83 s on average (range 4.05–6.39 s)</a:t>
                       </a:r>
                     </a:p>
                   </a:txBody>
@@ -6919,7 +6919,7 @@
                 </a:solidFill>
                 <a:latin typeface="Segoe UI"/>
               </a:rPr>
-              <a:t>Sampled during the run: 243 overviews and 708 coordinator snapshots, no violation, maximum observed grant 119 A.</a:t>
+              <a:t>Sampled during the run: 323 overviews and 947 coordinator snapshots, no violation, maximum observed grant 120 A (the limit).</a:t>
             </a:r>
           </a:p>
         </p:txBody>
@@ -7295,7 +7295,7 @@
                 </a:solidFill>
                 <a:latin typeface="Segoe UI"/>
               </a:rPr>
-              <a:t>1,529</a:t>
+              <a:t>1,559</a:t>
             </a:r>
           </a:p>
         </p:txBody>
@@ -7473,7 +7473,7 @@
                 </a:solidFill>
                 <a:latin typeface="Segoe UI"/>
               </a:rPr>
-              <a:t>284</a:t>
+              <a:t>427</a:t>
             </a:r>
           </a:p>
         </p:txBody>
@@ -7651,7 +7651,7 @@
                 </a:solidFill>
                 <a:latin typeface="Segoe UI"/>
               </a:rPr>
-              <a:t>1,183</a:t>
+              <a:t>1,055</a:t>
             </a:r>
           </a:p>
         </p:txBody>
@@ -7829,7 +7829,7 @@
                 </a:solidFill>
                 <a:latin typeface="Segoe UI"/>
               </a:rPr>
-              <a:t>62</a:t>
+              <a:t>77</a:t>
             </a:r>
           </a:p>
         </p:txBody>
@@ -8541,7 +8541,7 @@
                 </a:solidFill>
                 <a:latin typeface="Segoe UI"/>
               </a:rPr>
-              <a:t>22,808</a:t>
+              <a:t>40,791</a:t>
             </a:r>
           </a:p>
         </p:txBody>
@@ -8761,7 +8761,7 @@
                 </a:solidFill>
                 <a:latin typeface="Segoe UI"/>
               </a:rPr>
-              <a:t>A 503 or timeout may still have committed, so it is counted separately. The client retries with the same request ID. The 1,183 rejections were 1,182 capacity refusals and 1 deliberate changed-payload replay.</a:t>
+              <a:t>A 503 or timeout may still have committed, so it is counted separately. The client retries with the same request ID. The 1,055 rejections were 1,054 capacity refusals and 1 deliberate changed-payload replay.</a:t>
             </a:r>
           </a:p>
         </p:txBody>
@@ -9095,7 +9095,7 @@
                 </a:solidFill>
                 <a:latin typeface="Segoe UI"/>
               </a:rPr>
-              <a:t>Decision latency is the same at 10, 50 and 200 meters</a:t>
+              <a:t>Decision latency near 100 ms, even at 20× the meters</a:t>
             </a:r>
           </a:p>
         </p:txBody>
@@ -9305,10 +9305,10 @@
                 <a:tableStyleId>{5C22544A-7EE6-4342-B048-85BDC9FD1C3A}</a:tableStyleId>
               </a:tblPr>
               <a:tblGrid>
-                <a:gridCol w="777240"/>
-                <a:gridCol w="1143000"/>
-                <a:gridCol w="1280160"/>
-                <a:gridCol w="1170432"/>
+                <a:gridCol w="731520"/>
+                <a:gridCol w="1371600"/>
+                <a:gridCol w="1371600"/>
+                <a:gridCol w="896112"/>
               </a:tblGrid>
               <a:tr h="402336">
                 <a:tc>
@@ -9325,7 +9325,7 @@
                         </a:spcAft>
                       </a:pPr>
                       <a:r>
-                        <a:rPr sz="1300" b="1" i="0">
+                        <a:rPr sz="1200" b="1" i="0">
                           <a:solidFill>
                             <a:srgbClr val="FFFFFF"/>
                           </a:solidFill>
@@ -9355,7 +9355,7 @@
                         </a:spcAft>
                       </a:pPr>
                       <a:r>
-                        <a:rPr sz="1300" b="1" i="0">
+                        <a:rPr sz="1200" b="1" i="0">
                           <a:solidFill>
                             <a:srgbClr val="FFFFFF"/>
                           </a:solidFill>
@@ -9385,7 +9385,7 @@
                         </a:spcAft>
                       </a:pPr>
                       <a:r>
-                        <a:rPr sz="1300" b="1" i="0">
+                        <a:rPr sz="1200" b="1" i="0">
                           <a:solidFill>
                             <a:srgbClr val="FFFFFF"/>
                           </a:solidFill>
@@ -9415,7 +9415,7 @@
                         </a:spcAft>
                       </a:pPr>
                       <a:r>
-                        <a:rPr sz="1300" b="1" i="0">
+                        <a:rPr sz="1200" b="1" i="0">
                           <a:solidFill>
                             <a:srgbClr val="FFFFFF"/>
                           </a:solidFill>
@@ -9497,7 +9497,7 @@
                           </a:solidFill>
                           <a:latin typeface="Segoe UI"/>
                         </a:rPr>
-                        <a:t>79.5 ± 1.0</a:t>
+                        <a:t>86.6 ± 6.7</a:t>
                       </a:r>
                     </a:p>
                   </a:txBody>
@@ -9541,7 +9541,7 @@
                           </a:solidFill>
                           <a:latin typeface="Segoe UI"/>
                         </a:rPr>
-                        <a:t>113.3 ± 4.4</a:t>
+                        <a:t>133.1 ± 10.1</a:t>
                       </a:r>
                     </a:p>
                   </a:txBody>
@@ -9585,7 +9585,7 @@
                           </a:solidFill>
                           <a:latin typeface="Segoe UI"/>
                         </a:rPr>
-                        <a:t>9.7</a:t>
+                        <a:t>9.6</a:t>
                       </a:r>
                     </a:p>
                   </a:txBody>
@@ -9675,7 +9675,7 @@
                           </a:solidFill>
                           <a:latin typeface="Segoe UI"/>
                         </a:rPr>
-                        <a:t>78.3 ± 0.6</a:t>
+                        <a:t>99.8 ± 18.9</a:t>
                       </a:r>
                     </a:p>
                   </a:txBody>
@@ -9719,7 +9719,7 @@
                           </a:solidFill>
                           <a:latin typeface="Segoe UI"/>
                         </a:rPr>
-                        <a:t>112.9 ± 2.3</a:t>
+                        <a:t>167.0 ± 40.1</a:t>
                       </a:r>
                     </a:p>
                   </a:txBody>
@@ -9763,7 +9763,7 @@
                           </a:solidFill>
                           <a:latin typeface="Segoe UI"/>
                         </a:rPr>
-                        <a:t>57.8</a:t>
+                        <a:t>48.3</a:t>
                       </a:r>
                     </a:p>
                   </a:txBody>
@@ -9853,7 +9853,7 @@
                           </a:solidFill>
                           <a:latin typeface="Segoe UI"/>
                         </a:rPr>
-                        <a:t>79.4 ± 1.4</a:t>
+                        <a:t>107.5 ± 16.7</a:t>
                       </a:r>
                     </a:p>
                   </a:txBody>
@@ -9897,7 +9897,7 @@
                           </a:solidFill>
                           <a:latin typeface="Segoe UI"/>
                         </a:rPr>
-                        <a:t>114.1 ± 3.9</a:t>
+                        <a:t>156.7 ± 23.8</a:t>
                       </a:r>
                     </a:p>
                   </a:txBody>
@@ -9941,7 +9941,7 @@
                           </a:solidFill>
                           <a:latin typeface="Segoe UI"/>
                         </a:rPr>
-                        <a:t>193.9</a:t>
+                        <a:t>191.6</a:t>
                       </a:r>
                     </a:p>
                   </a:txBody>
@@ -10101,7 +10101,7 @@
                 </a:solidFill>
                 <a:latin typeface="Segoe UI"/>
               </a:rPr>
-              <a:t>20× the meters, same latency</a:t>
+              <a:t>20× the meters, similar latency</a:t>
             </a:r>
           </a:p>
         </p:txBody>
@@ -10143,7 +10143,7 @@
                 </a:solidFill>
                 <a:latin typeface="Segoe UI"/>
               </a:rPr>
-              <a:t>Gateway readings rose from 9.7 to 193.9 per second while decision p50 stayed near 78–80 ms. Each trial: 200 requests, 4 concurrent clients, all accepted, no errors.</a:t>
+              <a:t>Gateway readings rose from 9.6 to 191.6 per second while decision p50 moved from 87 to 107 ms, within large trial spread on a busy laptop. 200 requests per trial, 4 clients, all accepted.</a:t>
             </a:r>
           </a:p>
         </p:txBody>
@@ -10341,7 +10341,7 @@
                 </a:solidFill>
                 <a:latin typeface="Segoe UI"/>
               </a:rPr>
-              <a:t>Throughput plateaus near 50 decisions/s</a:t>
+              <a:t>Throughput plateaus near 47 decisions/s</a:t>
             </a:r>
           </a:p>
         </p:txBody>
@@ -10859,7 +10859,7 @@
                 </a:solidFill>
                 <a:latin typeface="Segoe UI"/>
               </a:rPr>
-              <a:t>Telemetry: 0.67 s end to end</a:t>
+              <a:t>Telemetry: 0.63 s end to end</a:t>
             </a:r>
           </a:p>
         </p:txBody>
@@ -10901,7 +10901,7 @@
                 </a:solidFill>
                 <a:latin typeface="Segoe UI"/>
               </a:rPr>
-              <a:t>A demand change became visible in 0.38–0.83 s (mean 0.67 s, 5 samples, polled every 0.1 s). An upper bound at that resolution.</a:t>
+              <a:t>A demand change became visible in 0.39–0.89 s (mean 0.63 s, 5 samples, polled every 0.1 s). An upper bound at that resolution.</a:t>
             </a:r>
           </a:p>
         </p:txBody>
@@ -11996,7 +11996,7 @@
                           </a:solidFill>
                           <a:latin typeface="Segoe UI"/>
                         </a:rPr>
-                        <a:t>Renewals never shrink a reservation</a:t>
+                        <a:t>Tiered reservations: each older, larger grant expires on its own 12 s hold</a:t>
                       </a:r>
                     </a:p>
                   </a:txBody>
@@ -12040,7 +12040,7 @@
                           </a:solidFill>
                           <a:latin typeface="Segoe UI"/>
                         </a:rPr>
-                        <a:t>Starvation seen after a 200-meter run; safe shrink is future work</a:t>
+                        <a:t>Still first-come: no preemption or fair-share policy</a:t>
                       </a:r>
                     </a:p>
                   </a:txBody>
@@ -12106,7 +12106,7 @@
                 </a:solidFill>
                 <a:latin typeface="Segoe UI"/>
               </a:rPr>
-              <a:t>After the starvation we saw, a reset script restarts the gateways so old reservations expire and buildings return to their current demand.</a:t>
+              <a:t>Starvation found and fixed: after a spike, every building was back within budget 17.6 s after demand fell.</a:t>
             </a:r>
           </a:p>
         </p:txBody>
@@ -12848,7 +12848,7 @@
                 </a:solidFill>
                 <a:latin typeface="Segoe UI"/>
               </a:rPr>
-              <a:t>No fairness guarantee; no production authentication or TLS design</a:t>
+              <a:t>First-come allocation, no fair-share policy; no production authentication or TLS design</a:t>
             </a:r>
           </a:p>
         </p:txBody>
@@ -13076,7 +13076,7 @@
                 </a:solidFill>
                 <a:latin typeface="Segoe UI"/>
               </a:rPr>
-              <a:t>Fair admission and a safe shrink rule</a:t>
+              <a:t>Fair-share admission and safe preemption</a:t>
             </a:r>
           </a:p>
           <a:p>
@@ -14063,7 +14063,7 @@
                 </a:solidFill>
                 <a:latin typeface="Segoe UI"/>
               </a:rPr>
-              <a:t>Failover in 4.82 s on average, 0 violations observed, about 50 decisions/s ceiling.</a:t>
+              <a:t>Failover in 4.83 s on average, 0 violations observed, about 47 decisions/s ceiling.</a:t>
             </a:r>
           </a:p>
         </p:txBody>
